--- a/media/exports/reports/2026-09/overtime.pptx
+++ b/media/exports/reports/2026-09/overtime.pptx
@@ -244,76 +244,76 @@
                 <c:formatCode>0.0"%";[Red](0.0"%")</c:formatCode>
                 <c:ptCount val="24"/>
                 <c:pt idx="0">
-                  <c:v>1.5</c:v>
+                  <c:v>1.6</c:v>
                 </c:pt>
                 <c:pt idx="1">
-                  <c:v>1.3</c:v>
+                  <c:v>2.7</c:v>
                 </c:pt>
                 <c:pt idx="2">
-                  <c:v>1.9</c:v>
+                  <c:v>2.2</c:v>
                 </c:pt>
                 <c:pt idx="3">
-                  <c:v>2.3</c:v>
+                  <c:v>3.0</c:v>
                 </c:pt>
                 <c:pt idx="4">
-                  <c:v>2.8</c:v>
+                  <c:v>4.6</c:v>
                 </c:pt>
                 <c:pt idx="5">
-                  <c:v>2.4</c:v>
+                  <c:v>4.4</c:v>
                 </c:pt>
                 <c:pt idx="6">
                   <c:v>3.6</c:v>
                 </c:pt>
                 <c:pt idx="7">
-                  <c:v>2.6</c:v>
+                  <c:v>3.7</c:v>
                 </c:pt>
                 <c:pt idx="8">
                   <c:v>2.8</c:v>
                 </c:pt>
                 <c:pt idx="9">
-                  <c:v>2.4</c:v>
+                  <c:v>3.3</c:v>
                 </c:pt>
                 <c:pt idx="10">
-                  <c:v>4.6</c:v>
+                  <c:v>3.3</c:v>
                 </c:pt>
                 <c:pt idx="11">
-                  <c:v>3.0</c:v>
+                  <c:v>3.7</c:v>
                 </c:pt>
                 <c:pt idx="12">
-                  <c:v>4.0</c:v>
+                  <c:v>3.9</c:v>
                 </c:pt>
                 <c:pt idx="13">
-                  <c:v>3.9</c:v>
+                  <c:v>3.8</c:v>
                 </c:pt>
                 <c:pt idx="14">
-                  <c:v>3.5</c:v>
+                  <c:v>7.7</c:v>
                 </c:pt>
                 <c:pt idx="15">
-                  <c:v>3.8</c:v>
+                  <c:v>3.1</c:v>
                 </c:pt>
                 <c:pt idx="16">
-                  <c:v>5.8</c:v>
+                  <c:v>4.2</c:v>
                 </c:pt>
                 <c:pt idx="17">
+                  <c:v>4.2</c:v>
+                </c:pt>
+                <c:pt idx="18">
+                  <c:v>5.9</c:v>
+                </c:pt>
+                <c:pt idx="19">
+                  <c:v>6.7</c:v>
+                </c:pt>
+                <c:pt idx="20">
+                  <c:v>7.2</c:v>
+                </c:pt>
+                <c:pt idx="21">
+                  <c:v>4.9</c:v>
+                </c:pt>
+                <c:pt idx="22">
                   <c:v>5.6</c:v>
                 </c:pt>
-                <c:pt idx="18">
+                <c:pt idx="23">
                   <c:v>5.8</c:v>
-                </c:pt>
-                <c:pt idx="19">
-                  <c:v>6.5</c:v>
-                </c:pt>
-                <c:pt idx="20">
-                  <c:v>5.4</c:v>
-                </c:pt>
-                <c:pt idx="21">
-                  <c:v>6.2</c:v>
-                </c:pt>
-                <c:pt idx="22">
-                  <c:v>5.2</c:v>
-                </c:pt>
-                <c:pt idx="23">
-                  <c:v>6.2</c:v>
                 </c:pt>
               </c:numCache>
             </c:numRef>
@@ -362,7 +362,7 @@
         <c:axId val="-2100718248"/>
         <c:scaling>
           <c:orientation val="minMax"/>
-          <c:max val="8.0"/>
+          <c:max val="10.0"/>
           <c:min val="0.0"/>
         </c:scaling>
         <c:delete val="0"/>
@@ -494,10 +494,10 @@
               <c:strCache>
                 <c:ptCount val="4"/>
                 <c:pt idx="0">
-                  <c:v>Short-staffed</c:v>
+                  <c:v>Paperwork and quotes</c:v>
                 </c:pt>
                 <c:pt idx="1">
-                  <c:v>Paperwork and quotes</c:v>
+                  <c:v>Short-staffed</c:v>
                 </c:pt>
                 <c:pt idx="2">
                   <c:v>Installation ran over</c:v>
@@ -515,16 +515,16 @@
                 <c:formatCode>#,##0;[Red](#,##0)</c:formatCode>
                 <c:ptCount val="4"/>
                 <c:pt idx="0">
-                  <c:v>4.5</c:v>
+                  <c:v>2.5</c:v>
                 </c:pt>
                 <c:pt idx="1">
                   <c:v>7.0</c:v>
                 </c:pt>
                 <c:pt idx="2">
-                  <c:v>18.5</c:v>
+                  <c:v>22.0</c:v>
                 </c:pt>
                 <c:pt idx="3">
-                  <c:v>41.0</c:v>
+                  <c:v>33.0</c:v>
                 </c:pt>
               </c:numCache>
             </c:numRef>
@@ -588,7 +588,7 @@
       <c:valAx>
         <c:axId val="-2113994440"/>
         <c:scaling>
-          <c:max val="47.15"/>
+          <c:max val="37.949999999999996"/>
           <c:min val="0.0"/>
         </c:scaling>
         <c:delete/>
@@ -716,25 +716,25 @@
               <c:strCache>
                 <c:ptCount val="7"/>
                 <c:pt idx="0">
-                  <c:v>Technician T4</c:v>
+                  <c:v>Technician T1</c:v>
                 </c:pt>
                 <c:pt idx="1">
-                  <c:v>Technician T6</c:v>
+                  <c:v>Technician T2</c:v>
                 </c:pt>
                 <c:pt idx="2">
-                  <c:v>Technician T1</c:v>
+                  <c:v>Technician T7</c:v>
                 </c:pt>
                 <c:pt idx="3">
-                  <c:v>Technician T5</c:v>
+                  <c:v>Technician T6</c:v>
                 </c:pt>
                 <c:pt idx="4">
                   <c:v>Technician T3</c:v>
                 </c:pt>
                 <c:pt idx="5">
-                  <c:v>Technician T7</c:v>
+                  <c:v>Technician T5</c:v>
                 </c:pt>
                 <c:pt idx="6">
-                  <c:v>Technician T2</c:v>
+                  <c:v>Technician T4</c:v>
                 </c:pt>
               </c:strCache>
             </c:strRef>
@@ -746,25 +746,25 @@
                 <c:formatCode>#,##0;[Red](#,##0)</c:formatCode>
                 <c:ptCount val="7"/>
                 <c:pt idx="0">
-                  <c:v>2.0</c:v>
+                  <c:v>3.5</c:v>
                 </c:pt>
                 <c:pt idx="1">
-                  <c:v>7.0</c:v>
+                  <c:v>4.0</c:v>
                 </c:pt>
                 <c:pt idx="2">
-                  <c:v>8.5</c:v>
+                  <c:v>6.5</c:v>
                 </c:pt>
                 <c:pt idx="3">
-                  <c:v>9.5</c:v>
+                  <c:v>7.5</c:v>
                 </c:pt>
                 <c:pt idx="4">
-                  <c:v>13.5</c:v>
+                  <c:v>11.5</c:v>
                 </c:pt>
                 <c:pt idx="5">
-                  <c:v>14.0</c:v>
+                  <c:v>14.5</c:v>
                 </c:pt>
                 <c:pt idx="6">
-                  <c:v>16.5</c:v>
+                  <c:v>17.0</c:v>
                 </c:pt>
               </c:numCache>
             </c:numRef>
@@ -828,7 +828,7 @@
       <c:valAx>
         <c:axId val="-2113994440"/>
         <c:scaling>
-          <c:max val="18.974999999999998"/>
+          <c:max val="19.549999999999997"/>
           <c:min val="0.0"/>
         </c:scaling>
         <c:delete/>
@@ -1325,7 +1325,7 @@
           <a:lstStyle/>
           <a:p>
             <a:r>
-              <a:t>Where is overtime creeping up, and why?. Overtime, September: 6.2%; Overtime hours, September: 71.0 h; September last year: 3.0%. Technicians worked 71.0 h of overtime in September, 6.2% of ordinary hours (target under 5.0%), against 5.2% in August. Over the last year it has gone from 3.0% to 6.2%. After-hours call-out is the main reason: 41.0 h, 57.7% of the overtime. Technician T2 carried the most (16.5 h). Above target by 14.0 h.</a:t>
+              <a:t>Where is overtime creeping up, and why?. Overtime, September: 5.8%; Overtime hours, September: 64.5 h; September last year: 3.7%. Technicians worked 64.5 h of overtime in September, 5.8% of ordinary hours (target under 5.0%), against 5.6% in August. Over the last year it has gone from 3.7% to 5.8%. After-hours call-out is the main reason: 33.0 h, 51.2% of the overtime. Technician T4 carried the most (17.0 h). Above target by 9.0 h.</a:t>
             </a:r>
           </a:p>
         </p:txBody>
@@ -4880,7 +4880,7 @@
                 </a:solidFill>
                 <a:latin typeface="Roboto"/>
               </a:rPr>
-              <a:t>Data retrieved 2pm, Tue 6 Oct 2026 · Generated 8 Oct 2026, 6:29pm · Sample data · Made with Python (python-pptx)</a:t>
+              <a:t>Data retrieved 2pm, Tue 6 Oct 2026 · Generated 8 Oct 2026, 11:41pm · Sample data · Made with Python (python-pptx)</a:t>
             </a:r>
           </a:p>
         </p:txBody>
@@ -5222,11 +5222,11 @@
             <a:r>
               <a:rPr sz="2200" b="1">
                 <a:solidFill>
-                  <a:srgbClr val="B42318"/>
+                  <a:srgbClr val="8A6D3B"/>
                 </a:solidFill>
                 <a:latin typeface="Roboto"/>
               </a:rPr>
-              <a:t>6.2%</a:t>
+              <a:t>5.8%</a:t>
             </a:r>
           </a:p>
         </p:txBody>
@@ -5392,7 +5392,7 @@
                 </a:solidFill>
                 <a:latin typeface="Roboto"/>
               </a:rPr>
-              <a:t>71.0 h</a:t>
+              <a:t>64.5 h</a:t>
             </a:r>
           </a:p>
         </p:txBody>
@@ -5431,7 +5431,7 @@
                 </a:solidFill>
                 <a:latin typeface="Roboto"/>
               </a:rPr>
-              <a:t>August 53.5 h</a:t>
+              <a:t>August 58.5 h</a:t>
             </a:r>
           </a:p>
         </p:txBody>
@@ -5558,7 +5558,7 @@
                 </a:solidFill>
                 <a:latin typeface="Roboto"/>
               </a:rPr>
-              <a:t>3.0%</a:t>
+              <a:t>3.7%</a:t>
             </a:r>
           </a:p>
         </p:txBody>
@@ -5597,7 +5597,7 @@
                 </a:solidFill>
                 <a:latin typeface="Roboto"/>
               </a:rPr>
-              <a:t>34.0 h of overtime</a:t>
+              <a:t>35.5 h of overtime</a:t>
             </a:r>
           </a:p>
         </p:txBody>
@@ -5742,7 +5742,7 @@
                 </a:solidFill>
                 <a:latin typeface="Roboto"/>
               </a:rPr>
-              <a:t>Technicians worked 71.0 h of overtime in September, 6.2% of ordinary hours (target under 5.0%), against 5.2% in August. Over the last year it has gone from 3.0% to 6.2%.</a:t>
+              <a:t>Technicians worked 64.5 h of overtime in September, 5.8% of ordinary hours (target under 5.0%), against 5.6% in August. Over the last year it has gone from 3.7% to 5.8%.</a:t>
             </a:r>
           </a:p>
         </p:txBody>
@@ -5869,7 +5869,7 @@
                 </a:solidFill>
                 <a:latin typeface="Roboto"/>
               </a:rPr>
-              <a:t>After-hours call-out is the main reason: 41.0 h, 57.7% of the overtime. Technician T2 carried the most (16.5 h). Above target by 14.0 h.</a:t>
+              <a:t>After-hours call-out is the main reason: 33.0 h, 51.2% of the overtime. Technician T4 carried the most (17.0 h). Above target by 9.0 h.</a:t>
             </a:r>
           </a:p>
         </p:txBody>
@@ -5947,7 +5947,7 @@
                 </a:solidFill>
                 <a:latin typeface="Roboto"/>
               </a:rPr>
-              <a:t>Data retrieved 2pm, Tue 6 Oct 2026 · Generated 8 Oct 2026, 6:29pm · Sample data · Made with Python (python-pptx)</a:t>
+              <a:t>Data retrieved 2pm, Tue 6 Oct 2026 · Generated 8 Oct 2026, 11:41pm · Sample data · Made with Python (python-pptx)</a:t>
             </a:r>
           </a:p>
         </p:txBody>
@@ -6262,7 +6262,7 @@
                 </a:solidFill>
                 <a:latin typeface="Roboto"/>
               </a:rPr>
-              <a:t>Data retrieved 2pm, Tue 6 Oct 2026 · Generated 8 Oct 2026, 6:29pm · Sample data · Made with Python (python-pptx)</a:t>
+              <a:t>Data retrieved 2pm, Tue 6 Oct 2026 · Generated 8 Oct 2026, 11:41pm · Sample data · Made with Python (python-pptx)</a:t>
             </a:r>
           </a:p>
         </p:txBody>
@@ -6577,7 +6577,7 @@
                 </a:solidFill>
                 <a:latin typeface="Roboto"/>
               </a:rPr>
-              <a:t>Data retrieved 2pm, Tue 6 Oct 2026 · Generated 8 Oct 2026, 6:29pm · Sample data · Made with Python (python-pptx)</a:t>
+              <a:t>Data retrieved 2pm, Tue 6 Oct 2026 · Generated 8 Oct 2026, 11:41pm · Sample data · Made with Python (python-pptx)</a:t>
             </a:r>
           </a:p>
         </p:txBody>

--- a/media/exports/reports/2026-09/overtime.pptx
+++ b/media/exports/reports/2026-09/overtime.pptx
@@ -1255,7 +1255,7 @@
           <a:lstStyle/>
           <a:p>
             <a:r>
-              <a:t>Where is overtime creeping up, and why?. Sample Electrical &amp; Air Pty Ltd. Period: September 2026. Each technician's paid hours, day by day: ordinary hours and overtime, with the main reason for the overtime.</a:t>
+              <a:t>Where is overtime creeping up, and why?. Sample Electrical &amp; Air Pty Ltd. Period: September 2026. In short: Overtime was 5.8% of ordinary hours in September (target under 5.0%), up from 3.7% a year earlier. Each technician's paid hours, day by day: ordinary hours and overtime, with the main reason for the overtime.</a:t>
             </a:r>
           </a:p>
         </p:txBody>
@@ -4715,7 +4715,7 @@
                 </a:solidFill>
                 <a:latin typeface="Roboto"/>
               </a:rPr>
-              <a:t>Period: September 2026. Each technician's paid hours, day by day: ordinary hours and overtime, with the main reason for the overtime.</a:t>
+              <a:t>Period: September 2026. In short: Overtime was 5.8% of ordinary hours in September (target under 5.0%), up from 3.7% a year earlier. Each technician's paid hours, day by day: ordinary hours and overtime, with the main reason for the overtime.</a:t>
             </a:r>
           </a:p>
         </p:txBody>
@@ -4880,7 +4880,7 @@
                 </a:solidFill>
                 <a:latin typeface="Roboto"/>
               </a:rPr>
-              <a:t>Data retrieved 2pm, Tue 6 Oct 2026 · Generated 8 Oct 2026, 11:41pm · Sample data · Made with Python (python-pptx)</a:t>
+              <a:t>Data retrieved 2pm, Tue 6 Oct 2026 · Generated 10 Oct 2026, 9:55pm · Sample data · Made with Python (python-pptx)</a:t>
             </a:r>
           </a:p>
         </p:txBody>
@@ -5947,7 +5947,7 @@
                 </a:solidFill>
                 <a:latin typeface="Roboto"/>
               </a:rPr>
-              <a:t>Data retrieved 2pm, Tue 6 Oct 2026 · Generated 8 Oct 2026, 11:41pm · Sample data · Made with Python (python-pptx)</a:t>
+              <a:t>Data retrieved 2pm, Tue 6 Oct 2026 · Generated 10 Oct 2026, 9:55pm · Sample data · Made with Python (python-pptx)</a:t>
             </a:r>
           </a:p>
         </p:txBody>
@@ -6262,7 +6262,7 @@
                 </a:solidFill>
                 <a:latin typeface="Roboto"/>
               </a:rPr>
-              <a:t>Data retrieved 2pm, Tue 6 Oct 2026 · Generated 8 Oct 2026, 11:41pm · Sample data · Made with Python (python-pptx)</a:t>
+              <a:t>Data retrieved 2pm, Tue 6 Oct 2026 · Generated 10 Oct 2026, 9:55pm · Sample data · Made with Python (python-pptx)</a:t>
             </a:r>
           </a:p>
         </p:txBody>
@@ -6577,7 +6577,7 @@
                 </a:solidFill>
                 <a:latin typeface="Roboto"/>
               </a:rPr>
-              <a:t>Data retrieved 2pm, Tue 6 Oct 2026 · Generated 8 Oct 2026, 11:41pm · Sample data · Made with Python (python-pptx)</a:t>
+              <a:t>Data retrieved 2pm, Tue 6 Oct 2026 · Generated 10 Oct 2026, 9:55pm · Sample data · Made with Python (python-pptx)</a:t>
             </a:r>
           </a:p>
         </p:txBody>
